--- a/ゲーム科2年/00_前期/ゲーム開発Ⅰ/18_シャドウマップ.pptx
+++ b/ゲーム科2年/00_前期/ゲーム開発Ⅰ/18_シャドウマップ.pptx
@@ -284,7 +284,7 @@
           <a:p>
             <a:fld id="{E9CC885B-4903-4D54-9A93-00025F12DED9}" type="datetimeFigureOut">
               <a:rPr kumimoji="1" lang="ja-JP" altLang="en-US" smtClean="0"/>
-              <a:t>2024/11/27</a:t>
+              <a:t>2025/2/7</a:t>
             </a:fld>
             <a:endParaRPr kumimoji="1" lang="ja-JP" altLang="en-US"/>
           </a:p>
@@ -514,7 +514,7 @@
           <a:p>
             <a:fld id="{E9CC885B-4903-4D54-9A93-00025F12DED9}" type="datetimeFigureOut">
               <a:rPr kumimoji="1" lang="ja-JP" altLang="en-US" smtClean="0"/>
-              <a:t>2024/11/27</a:t>
+              <a:t>2025/2/7</a:t>
             </a:fld>
             <a:endParaRPr kumimoji="1" lang="ja-JP" altLang="en-US"/>
           </a:p>
@@ -754,7 +754,7 @@
           <a:p>
             <a:fld id="{E9CC885B-4903-4D54-9A93-00025F12DED9}" type="datetimeFigureOut">
               <a:rPr kumimoji="1" lang="ja-JP" altLang="en-US" smtClean="0"/>
-              <a:t>2024/11/27</a:t>
+              <a:t>2025/2/7</a:t>
             </a:fld>
             <a:endParaRPr kumimoji="1" lang="ja-JP" altLang="en-US"/>
           </a:p>
@@ -984,7 +984,7 @@
           <a:p>
             <a:fld id="{E9CC885B-4903-4D54-9A93-00025F12DED9}" type="datetimeFigureOut">
               <a:rPr kumimoji="1" lang="ja-JP" altLang="en-US" smtClean="0"/>
-              <a:t>2024/11/27</a:t>
+              <a:t>2025/2/7</a:t>
             </a:fld>
             <a:endParaRPr kumimoji="1" lang="ja-JP" altLang="en-US"/>
           </a:p>
@@ -1259,7 +1259,7 @@
           <a:p>
             <a:fld id="{E9CC885B-4903-4D54-9A93-00025F12DED9}" type="datetimeFigureOut">
               <a:rPr kumimoji="1" lang="ja-JP" altLang="en-US" smtClean="0"/>
-              <a:t>2024/11/27</a:t>
+              <a:t>2025/2/7</a:t>
             </a:fld>
             <a:endParaRPr kumimoji="1" lang="ja-JP" altLang="en-US"/>
           </a:p>
@@ -1588,7 +1588,7 @@
           <a:p>
             <a:fld id="{E9CC885B-4903-4D54-9A93-00025F12DED9}" type="datetimeFigureOut">
               <a:rPr kumimoji="1" lang="ja-JP" altLang="en-US" smtClean="0"/>
-              <a:t>2024/11/27</a:t>
+              <a:t>2025/2/7</a:t>
             </a:fld>
             <a:endParaRPr kumimoji="1" lang="ja-JP" altLang="en-US"/>
           </a:p>
@@ -2064,7 +2064,7 @@
           <a:p>
             <a:fld id="{E9CC885B-4903-4D54-9A93-00025F12DED9}" type="datetimeFigureOut">
               <a:rPr kumimoji="1" lang="ja-JP" altLang="en-US" smtClean="0"/>
-              <a:t>2024/11/27</a:t>
+              <a:t>2025/2/7</a:t>
             </a:fld>
             <a:endParaRPr kumimoji="1" lang="ja-JP" altLang="en-US"/>
           </a:p>
@@ -2205,7 +2205,7 @@
           <a:p>
             <a:fld id="{E9CC885B-4903-4D54-9A93-00025F12DED9}" type="datetimeFigureOut">
               <a:rPr kumimoji="1" lang="ja-JP" altLang="en-US" smtClean="0"/>
-              <a:t>2024/11/27</a:t>
+              <a:t>2025/2/7</a:t>
             </a:fld>
             <a:endParaRPr kumimoji="1" lang="ja-JP" altLang="en-US"/>
           </a:p>
@@ -2318,7 +2318,7 @@
           <a:p>
             <a:fld id="{E9CC885B-4903-4D54-9A93-00025F12DED9}" type="datetimeFigureOut">
               <a:rPr kumimoji="1" lang="ja-JP" altLang="en-US" smtClean="0"/>
-              <a:t>2024/11/27</a:t>
+              <a:t>2025/2/7</a:t>
             </a:fld>
             <a:endParaRPr kumimoji="1" lang="ja-JP" altLang="en-US"/>
           </a:p>
@@ -2661,7 +2661,7 @@
           <a:p>
             <a:fld id="{E9CC885B-4903-4D54-9A93-00025F12DED9}" type="datetimeFigureOut">
               <a:rPr kumimoji="1" lang="ja-JP" altLang="en-US" smtClean="0"/>
-              <a:t>2024/11/27</a:t>
+              <a:t>2025/2/7</a:t>
             </a:fld>
             <a:endParaRPr kumimoji="1" lang="ja-JP" altLang="en-US"/>
           </a:p>
@@ -2949,7 +2949,7 @@
           <a:p>
             <a:fld id="{E9CC885B-4903-4D54-9A93-00025F12DED9}" type="datetimeFigureOut">
               <a:rPr kumimoji="1" lang="ja-JP" altLang="en-US" smtClean="0"/>
-              <a:t>2024/11/27</a:t>
+              <a:t>2025/2/7</a:t>
             </a:fld>
             <a:endParaRPr kumimoji="1" lang="ja-JP" altLang="en-US"/>
           </a:p>
@@ -3222,7 +3222,7 @@
           <a:p>
             <a:fld id="{E9CC885B-4903-4D54-9A93-00025F12DED9}" type="datetimeFigureOut">
               <a:rPr kumimoji="1" lang="ja-JP" altLang="en-US" smtClean="0"/>
-              <a:t>2024/11/27</a:t>
+              <a:t>2025/2/7</a:t>
             </a:fld>
             <a:endParaRPr kumimoji="1" lang="ja-JP" altLang="en-US"/>
           </a:p>
@@ -4512,7 +4512,7 @@
         <p:spPr>
           <a:xfrm>
             <a:off x="567542" y="3822700"/>
-            <a:ext cx="4493538" cy="461665"/>
+            <a:ext cx="9417963" cy="1200329"/>
           </a:xfrm>
           <a:prstGeom prst="rect">
             <a:avLst/>
@@ -4530,6 +4530,32 @@
               <a:t>上の設定でも結構大きい。。。</a:t>
             </a:r>
             <a:endParaRPr lang="en-US" altLang="ja-JP" sz="2400" dirty="0"/>
+          </a:p>
+          <a:p>
+            <a:endParaRPr lang="en-US" altLang="ja-JP" sz="2400" dirty="0"/>
+          </a:p>
+          <a:p>
+            <a:r>
+              <a:rPr lang="en-US" altLang="ja-JP" sz="2400" b="1" dirty="0">
+                <a:solidFill>
+                  <a:srgbClr val="FF0000"/>
+                </a:solidFill>
+              </a:rPr>
+              <a:t>※</a:t>
+            </a:r>
+            <a:r>
+              <a:rPr lang="ja-JP" altLang="en-US" sz="2400" b="1" dirty="0">
+                <a:solidFill>
+                  <a:srgbClr val="FF0000"/>
+                </a:solidFill>
+              </a:rPr>
+              <a:t>無理に使わずに丸影画像で対応するのも十分良いとは思います。</a:t>
+            </a:r>
+            <a:endParaRPr lang="en-US" altLang="ja-JP" sz="2400" b="1" dirty="0">
+              <a:solidFill>
+                <a:srgbClr val="FF0000"/>
+              </a:solidFill>
+            </a:endParaRPr>
           </a:p>
         </p:txBody>
       </p:sp>
